--- a/slides for class/my slides/Expressions and Statements.pptx
+++ b/slides for class/my slides/Expressions and Statements.pptx
@@ -16,9 +16,9 @@
     <p:sldId id="387" r:id="rId7"/>
     <p:sldId id="388" r:id="rId8"/>
     <p:sldId id="389" r:id="rId9"/>
-    <p:sldId id="390" r:id="rId10"/>
-    <p:sldId id="393" r:id="rId11"/>
-    <p:sldId id="394" r:id="rId12"/>
+    <p:sldId id="396" r:id="rId10"/>
+    <p:sldId id="394" r:id="rId11"/>
+    <p:sldId id="395" r:id="rId12"/>
     <p:sldId id="359" r:id="rId13"/>
     <p:sldId id="392" r:id="rId14"/>
     <p:sldId id="373" r:id="rId15"/>
@@ -252,7 +252,7 @@
           <a:p>
             <a:fld id="{258BFD57-AB0A-470B-A7AF-56DFE7B5174A}" type="datetimeFigureOut">
               <a:rPr lang="en-US" smtClean="0"/>
-              <a:t>12/19/24</a:t>
+              <a:t>8/8/25</a:t>
             </a:fld>
             <a:endParaRPr lang="en-US" dirty="0"/>
           </a:p>
@@ -429,7 +429,7 @@
           <a:p>
             <a:fld id="{D4B3339F-6CEA-4641-BE08-40DAFD6FCF25}" type="datetimeFigureOut">
               <a:rPr lang="en-US" smtClean="0"/>
-              <a:t>12/19/24</a:t>
+              <a:t>8/8/25</a:t>
             </a:fld>
             <a:endParaRPr lang="en-US" dirty="0"/>
           </a:p>
@@ -1978,7 +1978,7 @@
           <p:nvPr userDrawn="1"/>
         </p:nvPicPr>
         <p:blipFill rotWithShape="1">
-          <a:blip r:embed="rId2" cstate="screen">
+          <a:blip cstate="screen">
             <a:extLst>
               <a:ext uri="{28A0092B-C50C-407E-A947-70E740481C1C}">
                 <a14:useLocalDpi xmlns:a14="http://schemas.microsoft.com/office/drawing/2010/main"/>
@@ -4357,7 +4357,7 @@
             <p:nvPr userDrawn="1"/>
           </p:nvPicPr>
           <p:blipFill rotWithShape="1">
-            <a:blip r:embed="rId2" cstate="screen">
+            <a:blip cstate="screen">
               <a:extLst>
                 <a:ext uri="{28A0092B-C50C-407E-A947-70E740481C1C}">
                   <a14:useLocalDpi xmlns:a14="http://schemas.microsoft.com/office/drawing/2010/main"/>
@@ -4721,7 +4721,7 @@
           <p:nvPr userDrawn="1"/>
         </p:nvPicPr>
         <p:blipFill rotWithShape="1">
-          <a:blip r:embed="rId2" cstate="screen">
+          <a:blip cstate="screen">
             <a:extLst>
               <a:ext uri="{28A0092B-C50C-407E-A947-70E740481C1C}">
                 <a14:useLocalDpi xmlns:a14="http://schemas.microsoft.com/office/drawing/2010/main"/>
@@ -4959,7 +4959,7 @@
             <p:nvPr/>
           </p:nvPicPr>
           <p:blipFill rotWithShape="1">
-            <a:blip r:embed="rId2" cstate="screen">
+            <a:blip cstate="screen">
               <a:alphaModFix/>
               <a:extLst>
                 <a:ext uri="{28A0092B-C50C-407E-A947-70E740481C1C}">
@@ -6292,7 +6292,7 @@
           <p:nvPr userDrawn="1"/>
         </p:nvPicPr>
         <p:blipFill rotWithShape="1">
-          <a:blip r:embed="rId2" cstate="screen">
+          <a:blip cstate="screen">
             <a:extLst>
               <a:ext uri="{28A0092B-C50C-407E-A947-70E740481C1C}">
                 <a14:useLocalDpi xmlns:a14="http://schemas.microsoft.com/office/drawing/2010/main"/>
@@ -6915,7 +6915,7 @@
             <p:nvPr/>
           </p:nvPicPr>
           <p:blipFill rotWithShape="1">
-            <a:blip r:embed="rId2" cstate="screen">
+            <a:blip cstate="screen">
               <a:extLst>
                 <a:ext uri="{28A0092B-C50C-407E-A947-70E740481C1C}">
                   <a14:useLocalDpi xmlns:a14="http://schemas.microsoft.com/office/drawing/2010/main"/>
@@ -7785,7 +7785,7 @@
             <p:nvPr/>
           </p:nvPicPr>
           <p:blipFill rotWithShape="1">
-            <a:blip r:embed="rId2" cstate="screen">
+            <a:blip cstate="screen">
               <a:extLst>
                 <a:ext uri="{28A0092B-C50C-407E-A947-70E740481C1C}">
                   <a14:useLocalDpi xmlns:a14="http://schemas.microsoft.com/office/drawing/2010/main"/>
@@ -11037,7 +11037,7 @@
           </p:nvPr>
         </p:nvPicPr>
         <p:blipFill>
-          <a:blip r:embed="rId3"/>
+          <a:blip/>
           <a:srcRect t="31" b="31"/>
           <a:stretch/>
         </p:blipFill>
@@ -11892,7 +11892,7 @@
           </p:nvPr>
         </p:nvPicPr>
         <p:blipFill rotWithShape="1">
-          <a:blip r:embed="rId3" cstate="screen">
+          <a:blip cstate="screen">
             <a:extLst>
               <a:ext uri="{28A0092B-C50C-407E-A947-70E740481C1C}">
                 <a14:useLocalDpi xmlns:a14="http://schemas.microsoft.com/office/drawing/2010/main"/>
@@ -15436,63 +15436,71 @@
           <a:lstStyle/>
           <a:p>
             <a:r>
-              <a:rPr lang="en-US" dirty="0"/>
-              <a:t>An expression is a fragment of code that produces a value</a:t>
-            </a:r>
-          </a:p>
-          <a:p>
-            <a:pPr marL="285750" indent="-285750">
+              <a:rPr lang="en-US" sz="2200" dirty="0"/>
+              <a:t>An </a:t>
+            </a:r>
+            <a:r>
+              <a:rPr lang="en-US" sz="2200" b="1" dirty="0"/>
+              <a:t>expression</a:t>
+            </a:r>
+            <a:r>
+              <a:rPr lang="en-US" sz="2200" dirty="0"/>
+              <a:t> is a fragment of code that produces a value</a:t>
+            </a:r>
+          </a:p>
+          <a:p>
+            <a:pPr marL="569214" lvl="1">
               <a:buFontTx/>
               <a:buChar char="-"/>
             </a:pPr>
             <a:r>
-              <a:rPr lang="en-US" dirty="0"/>
-              <a:t>Every value written literally (22 or ‘psychoanalysis’)</a:t>
-            </a:r>
-          </a:p>
-          <a:p>
-            <a:pPr marL="285750" indent="-285750">
+              <a:rPr lang="en-US" sz="2200" dirty="0"/>
+              <a:t>Every value written literally                                         // 22, ‘psychoanalysis’</a:t>
+            </a:r>
+          </a:p>
+          <a:p>
+            <a:pPr marL="569214" lvl="1">
               <a:buFontTx/>
               <a:buChar char="-"/>
             </a:pPr>
             <a:r>
-              <a:rPr lang="en-US" dirty="0"/>
-              <a:t>Expression between parentheses (???)</a:t>
-            </a:r>
-          </a:p>
-          <a:p>
-            <a:pPr marL="285750" indent="-285750">
+              <a:rPr lang="en-US" sz="2200" dirty="0"/>
+              <a:t>Expression between parentheses                              // (car)</a:t>
+            </a:r>
+          </a:p>
+          <a:p>
+            <a:pPr marL="569214" lvl="1">
               <a:buFontTx/>
               <a:buChar char="-"/>
             </a:pPr>
             <a:r>
-              <a:rPr lang="en-US" dirty="0"/>
-              <a:t>Binary operator applied to two expressions  // 22 + 38, a + b</a:t>
-            </a:r>
-          </a:p>
-          <a:p>
-            <a:pPr marL="285750" indent="-285750">
+              <a:rPr lang="en-US" sz="2200" dirty="0"/>
+              <a:t>Binary operator applied to two expressions              // 22 + 38, a + b</a:t>
+            </a:r>
+          </a:p>
+          <a:p>
+            <a:pPr marL="569214" lvl="1">
               <a:buFontTx/>
               <a:buChar char="-"/>
             </a:pPr>
             <a:r>
-              <a:rPr lang="en-US" dirty="0"/>
-              <a:t>Unary operator applied to one  // a++</a:t>
-            </a:r>
-          </a:p>
-          <a:p>
-            <a:r>
-              <a:rPr lang="en-US" dirty="0"/>
+              <a:rPr lang="en-US" sz="2200" dirty="0"/>
+              <a:t>Unary operator applied to one                                  // a++</a:t>
+            </a:r>
+          </a:p>
+          <a:p>
+            <a:r>
+              <a:rPr lang="en-US" sz="2200" dirty="0"/>
               <a:t>Expressions can also contain other expressions</a:t>
             </a:r>
           </a:p>
           <a:p>
-            <a:pPr marL="285750" indent="-285750">
+            <a:pPr marL="569214" lvl="1">
               <a:buFontTx/>
               <a:buChar char="-"/>
             </a:pPr>
             <a:r>
-              <a:rPr lang="en-US" dirty="0"/>
+              <a:rPr lang="en-US" sz="2200" dirty="0"/>
               <a:t>Like a subsentence containing other subsentences</a:t>
             </a:r>
           </a:p>
@@ -15619,38 +15627,54 @@
           <a:lstStyle/>
           <a:p>
             <a:r>
-              <a:rPr lang="en-US" dirty="0"/>
-              <a:t>If an expression is considered like a sentence fragment, a statement corresponds to a full sentence</a:t>
-            </a:r>
-          </a:p>
-          <a:p>
-            <a:pPr marL="285750" indent="-285750">
+              <a:rPr lang="en-US" sz="2200" dirty="0"/>
+              <a:t>If an expression is considered like a sentence fragment, a </a:t>
+            </a:r>
+            <a:r>
+              <a:rPr lang="en-US" sz="2200" b="1" dirty="0"/>
+              <a:t>statement</a:t>
+            </a:r>
+            <a:r>
+              <a:rPr lang="en-US" sz="2200" dirty="0"/>
+              <a:t> corresponds to a full sentence</a:t>
+            </a:r>
+          </a:p>
+          <a:p>
+            <a:pPr marL="569214" lvl="1">
               <a:buFontTx/>
               <a:buChar char="-"/>
             </a:pPr>
             <a:r>
-              <a:rPr lang="en-US" dirty="0"/>
-              <a:t>A program is a list of statements</a:t>
-            </a:r>
-          </a:p>
-          <a:p>
-            <a:pPr marL="285750" indent="-285750">
+              <a:rPr lang="en-US" sz="2200" dirty="0"/>
+              <a:t>A </a:t>
+            </a:r>
+            <a:r>
+              <a:rPr lang="en-US" sz="2200" b="1" dirty="0"/>
+              <a:t>program</a:t>
+            </a:r>
+            <a:r>
+              <a:rPr lang="en-US" sz="2200" dirty="0"/>
+              <a:t> is a list of statements</a:t>
+            </a:r>
+          </a:p>
+          <a:p>
+            <a:pPr marL="569214" lvl="1">
               <a:buFontTx/>
               <a:buChar char="-"/>
             </a:pPr>
             <a:r>
-              <a:rPr lang="en-US" dirty="0"/>
+              <a:rPr lang="en-US" sz="2200" dirty="0"/>
               <a:t>A statement is an expression with a semicolon after it</a:t>
             </a:r>
           </a:p>
           <a:p>
-            <a:pPr marL="285750" indent="-285750">
+            <a:pPr marL="569214" lvl="1">
               <a:buFontTx/>
               <a:buChar char="-"/>
             </a:pPr>
             <a:r>
-              <a:rPr lang="en-US" dirty="0"/>
-              <a:t>If a statement doesn’t affect the world, it’s useless (???)</a:t>
+              <a:rPr lang="en-US" sz="2200" dirty="0"/>
+              <a:t>If a statement doesn’t affect the world, it’s useless           // 1;</a:t>
             </a:r>
           </a:p>
         </p:txBody>
@@ -15776,28 +15800,16 @@
           <a:lstStyle/>
           <a:p>
             <a:r>
-              <a:rPr lang="en-US" dirty="0"/>
-              <a:t>The environment is the collection of bindings and their values that exist at a given time</a:t>
-            </a:r>
-          </a:p>
-          <a:p>
-            <a:pPr marL="285750" indent="-285750">
-              <a:buFontTx/>
-              <a:buChar char="-"/>
-            </a:pPr>
-            <a:r>
-              <a:rPr lang="en-US" dirty="0"/>
-              <a:t>Always contain bindings that are part of the language standard (???)</a:t>
-            </a:r>
-          </a:p>
-          <a:p>
-            <a:pPr marL="285750" indent="-285750">
-              <a:buFontTx/>
-              <a:buChar char="-"/>
-            </a:pPr>
-            <a:r>
-              <a:rPr lang="en-US" dirty="0"/>
-              <a:t>Most of the time contain bindings that provide ways to interact with the surrounding system</a:t>
+              <a:rPr lang="en-US" sz="2200" dirty="0"/>
+              <a:t>The </a:t>
+            </a:r>
+            <a:r>
+              <a:rPr lang="en-US" sz="2200" b="1" dirty="0"/>
+              <a:t>environment</a:t>
+            </a:r>
+            <a:r>
+              <a:rPr lang="en-US" sz="2200" dirty="0"/>
+              <a:t> is the collection of bindings and their values that exist at a given time</a:t>
             </a:r>
           </a:p>
           <a:p>
@@ -15806,7 +15818,37 @@
               <a:buChar char="-"/>
             </a:pPr>
             <a:r>
-              <a:rPr lang="en-US" dirty="0"/>
+              <a:rPr lang="en-US" sz="2200" dirty="0"/>
+              <a:t>Always contain bindings that are part of the language standard  </a:t>
+            </a:r>
+          </a:p>
+          <a:p>
+            <a:pPr marL="852678" lvl="2">
+              <a:buFontTx/>
+              <a:buChar char="-"/>
+            </a:pPr>
+            <a:r>
+              <a:rPr lang="en-US" sz="2200" dirty="0"/>
+              <a:t>Ex: NaN, Infinity</a:t>
+            </a:r>
+          </a:p>
+          <a:p>
+            <a:pPr marL="569214" lvl="1">
+              <a:buFontTx/>
+              <a:buChar char="-"/>
+            </a:pPr>
+            <a:r>
+              <a:rPr lang="en-US" sz="2200" dirty="0"/>
+              <a:t>Most of the time contain bindings that provide ways to interact with the surrounding system</a:t>
+            </a:r>
+          </a:p>
+          <a:p>
+            <a:pPr marL="852678" lvl="2">
+              <a:buFontTx/>
+              <a:buChar char="-"/>
+            </a:pPr>
+            <a:r>
+              <a:rPr lang="en-US" sz="2200" dirty="0"/>
               <a:t>Ex: A browser has functions to interact with the currently loaded website and to read mouse and keyboard input</a:t>
             </a:r>
           </a:p>
@@ -15863,7 +15905,7 @@
         <p:cNvPr id="1" name="">
           <a:extLst>
             <a:ext uri="{FF2B5EF4-FFF2-40B4-BE49-F238E27FC236}">
-              <a16:creationId xmlns:a16="http://schemas.microsoft.com/office/drawing/2014/main" id="{E0BB048E-1D46-204F-E17C-110B7279AE94}"/>
+              <a16:creationId xmlns:a16="http://schemas.microsoft.com/office/drawing/2014/main" id="{4E555572-2902-FD05-3575-6667D63F0E7A}"/>
             </a:ext>
           </a:extLst>
         </p:cNvPr>
@@ -15883,7 +15925,7 @@
           <p:cNvPr id="2" name="Title 1">
             <a:extLst>
               <a:ext uri="{FF2B5EF4-FFF2-40B4-BE49-F238E27FC236}">
-                <a16:creationId xmlns:a16="http://schemas.microsoft.com/office/drawing/2014/main" id="{D62EEDFE-6502-2AD6-024A-2874E3C1D0E8}"/>
+                <a16:creationId xmlns:a16="http://schemas.microsoft.com/office/drawing/2014/main" id="{77312A3A-83A8-2A24-867A-6FF67A999234}"/>
               </a:ext>
             </a:extLst>
           </p:cNvPr>
@@ -15911,7 +15953,7 @@
           <p:cNvPr id="4" name="Content Placeholder 3">
             <a:extLst>
               <a:ext uri="{FF2B5EF4-FFF2-40B4-BE49-F238E27FC236}">
-                <a16:creationId xmlns:a16="http://schemas.microsoft.com/office/drawing/2014/main" id="{69CD89F2-CA07-E605-E874-739550CA6177}"/>
+                <a16:creationId xmlns:a16="http://schemas.microsoft.com/office/drawing/2014/main" id="{6DAED351-F5E7-ADAD-2C1B-985FA5105030}"/>
               </a:ext>
             </a:extLst>
           </p:cNvPr>
@@ -15933,44 +15975,84 @@
           <a:lstStyle/>
           <a:p>
             <a:r>
-              <a:rPr lang="en-US" dirty="0"/>
-              <a:t>A function is a piece of program wrapped in a value</a:t>
-            </a:r>
-          </a:p>
-          <a:p>
-            <a:pPr marL="285750" indent="-285750">
+              <a:rPr lang="en-US" sz="2200" dirty="0"/>
+              <a:t>A </a:t>
+            </a:r>
+            <a:r>
+              <a:rPr lang="en-US" sz="2200" b="1" dirty="0"/>
+              <a:t>function</a:t>
+            </a:r>
+            <a:r>
+              <a:rPr lang="en-US" sz="2200" dirty="0"/>
+              <a:t> is a piece of program wrapped in a value</a:t>
+            </a:r>
+          </a:p>
+          <a:p>
+            <a:pPr marL="569214" lvl="1">
               <a:buFontTx/>
               <a:buChar char="-"/>
             </a:pPr>
             <a:r>
-              <a:rPr lang="en-US" dirty="0"/>
-              <a:t>Ex: the binding prompt holds a function (???)</a:t>
-            </a:r>
-          </a:p>
-          <a:p>
-            <a:r>
-              <a:rPr lang="en-US" dirty="0"/>
-              <a:t>Executing a function is called invoking, calling or applying it</a:t>
-            </a:r>
-          </a:p>
-          <a:p>
-            <a:pPr marL="285750" indent="-285750">
+              <a:rPr lang="en-US" sz="2200" dirty="0"/>
+              <a:t>Ex: the binding </a:t>
+            </a:r>
+            <a:r>
+              <a:rPr lang="en-US" sz="2200" b="1" dirty="0"/>
+              <a:t>prompt</a:t>
+            </a:r>
+            <a:r>
+              <a:rPr lang="en-US" sz="2200" dirty="0"/>
+              <a:t> holds a function</a:t>
+            </a:r>
+          </a:p>
+          <a:p>
+            <a:r>
+              <a:rPr lang="en-US" sz="2200" dirty="0"/>
+              <a:t>Executing a function is called </a:t>
+            </a:r>
+            <a:r>
+              <a:rPr lang="en-US" sz="2200" b="1" dirty="0"/>
+              <a:t>invoking</a:t>
+            </a:r>
+            <a:r>
+              <a:rPr lang="en-US" sz="2200" dirty="0"/>
+              <a:t>, </a:t>
+            </a:r>
+            <a:r>
+              <a:rPr lang="en-US" sz="2200" b="1" dirty="0"/>
+              <a:t>calling</a:t>
+            </a:r>
+            <a:r>
+              <a:rPr lang="en-US" sz="2200" dirty="0"/>
+              <a:t> or </a:t>
+            </a:r>
+            <a:r>
+              <a:rPr lang="en-US" sz="2200" b="1" dirty="0"/>
+              <a:t>applying</a:t>
+            </a:r>
+            <a:r>
+              <a:rPr lang="en-US" sz="2200" dirty="0"/>
+              <a:t> it</a:t>
+            </a:r>
+          </a:p>
+          <a:p>
+            <a:pPr marL="569214" lvl="1">
               <a:buFontTx/>
               <a:buChar char="-"/>
             </a:pPr>
             <a:r>
-              <a:rPr lang="en-US" dirty="0"/>
+              <a:rPr lang="en-US" sz="2200" dirty="0"/>
               <a:t>You call a function by putting parentheses after an expression that produces a function value</a:t>
             </a:r>
           </a:p>
           <a:p>
-            <a:pPr marL="285750" indent="-285750">
+            <a:pPr marL="569214" lvl="1">
               <a:buFontTx/>
               <a:buChar char="-"/>
             </a:pPr>
             <a:r>
-              <a:rPr lang="en-US" dirty="0"/>
-              <a:t>You usually directly use the nae of the binding that holds the function</a:t>
+              <a:rPr lang="en-US" sz="2200" dirty="0"/>
+              <a:t>You usually directly use the name of the binding that holds the function</a:t>
             </a:r>
           </a:p>
         </p:txBody>
@@ -15980,7 +16062,7 @@
           <p:cNvPr id="5" name="Slide Number Placeholder 4">
             <a:extLst>
               <a:ext uri="{FF2B5EF4-FFF2-40B4-BE49-F238E27FC236}">
-                <a16:creationId xmlns:a16="http://schemas.microsoft.com/office/drawing/2014/main" id="{07784733-A516-D905-A799-8BE017850A82}"/>
+                <a16:creationId xmlns:a16="http://schemas.microsoft.com/office/drawing/2014/main" id="{731F3068-9767-933E-C093-B081AF8860B5}"/>
               </a:ext>
             </a:extLst>
           </p:cNvPr>
@@ -16008,7 +16090,7 @@
     </p:spTree>
     <p:extLst>
       <p:ext uri="{BB962C8B-B14F-4D97-AF65-F5344CB8AC3E}">
-        <p14:creationId xmlns:p14="http://schemas.microsoft.com/office/powerpoint/2010/main" val="2372833108"/>
+        <p14:creationId xmlns:p14="http://schemas.microsoft.com/office/powerpoint/2010/main" val="929387996"/>
       </p:ext>
     </p:extLst>
   </p:cSld>
@@ -16019,209 +16101,6 @@
 </file>
 
 <file path=ppt/slides/slide7.xml><?xml version="1.0" encoding="utf-8"?>
-<p:sld xmlns:a="http://schemas.openxmlformats.org/drawingml/2006/main" xmlns:r="http://schemas.openxmlformats.org/officeDocument/2006/relationships" xmlns:p="http://schemas.openxmlformats.org/presentationml/2006/main">
-  <p:cSld>
-    <p:spTree>
-      <p:nvGrpSpPr>
-        <p:cNvPr id="1" name="">
-          <a:extLst>
-            <a:ext uri="{FF2B5EF4-FFF2-40B4-BE49-F238E27FC236}">
-              <a16:creationId xmlns:a16="http://schemas.microsoft.com/office/drawing/2014/main" id="{B65D1719-2F1A-F3D0-39E8-87FD4E941052}"/>
-            </a:ext>
-          </a:extLst>
-        </p:cNvPr>
-        <p:cNvGrpSpPr/>
-        <p:nvPr/>
-      </p:nvGrpSpPr>
-      <p:grpSpPr>
-        <a:xfrm>
-          <a:off x="0" y="0"/>
-          <a:ext cx="0" cy="0"/>
-          <a:chOff x="0" y="0"/>
-          <a:chExt cx="0" cy="0"/>
-        </a:xfrm>
-      </p:grpSpPr>
-      <p:sp>
-        <p:nvSpPr>
-          <p:cNvPr id="2" name="Title 1">
-            <a:extLst>
-              <a:ext uri="{FF2B5EF4-FFF2-40B4-BE49-F238E27FC236}">
-                <a16:creationId xmlns:a16="http://schemas.microsoft.com/office/drawing/2014/main" id="{D5C96E9B-9B37-3E19-D484-A081FD6662CA}"/>
-              </a:ext>
-            </a:extLst>
-          </p:cNvPr>
-          <p:cNvSpPr>
-            <a:spLocks noGrp="1"/>
-          </p:cNvSpPr>
-          <p:nvPr>
-            <p:ph type="title"/>
-          </p:nvPr>
-        </p:nvSpPr>
-        <p:spPr/>
-        <p:txBody>
-          <a:bodyPr/>
-          <a:lstStyle/>
-          <a:p>
-            <a:r>
-              <a:rPr lang="en-US" dirty="0"/>
-              <a:t>Function</a:t>
-            </a:r>
-          </a:p>
-        </p:txBody>
-      </p:sp>
-      <p:sp>
-        <p:nvSpPr>
-          <p:cNvPr id="4" name="Content Placeholder 3">
-            <a:extLst>
-              <a:ext uri="{FF2B5EF4-FFF2-40B4-BE49-F238E27FC236}">
-                <a16:creationId xmlns:a16="http://schemas.microsoft.com/office/drawing/2014/main" id="{7D1C356D-2B22-B44D-0107-2C559A08CE02}"/>
-              </a:ext>
-            </a:extLst>
-          </p:cNvPr>
-          <p:cNvSpPr>
-            <a:spLocks noGrp="1"/>
-          </p:cNvSpPr>
-          <p:nvPr>
-            <p:ph sz="quarter" idx="36"/>
-          </p:nvPr>
-        </p:nvSpPr>
-        <p:spPr>
-          <a:xfrm>
-            <a:off x="741680" y="2465539"/>
-            <a:ext cx="10500989" cy="3723753"/>
-          </a:xfrm>
-        </p:spPr>
-        <p:txBody>
-          <a:bodyPr/>
-          <a:lstStyle/>
-          <a:p>
-            <a:r>
-              <a:rPr lang="en-US" dirty="0"/>
-              <a:t>A </a:t>
-            </a:r>
-            <a:r>
-              <a:rPr lang="en-US" b="1" dirty="0"/>
-              <a:t>function</a:t>
-            </a:r>
-            <a:r>
-              <a:rPr lang="en-US" dirty="0"/>
-              <a:t> is a piece of program wrapped in a value</a:t>
-            </a:r>
-          </a:p>
-          <a:p>
-            <a:pPr marL="285750" indent="-285750">
-              <a:buFontTx/>
-              <a:buChar char="-"/>
-            </a:pPr>
-            <a:r>
-              <a:rPr lang="en-US" dirty="0"/>
-              <a:t>Ex: the binding </a:t>
-            </a:r>
-            <a:r>
-              <a:rPr lang="en-US" b="1" dirty="0"/>
-              <a:t>prompt</a:t>
-            </a:r>
-            <a:r>
-              <a:rPr lang="en-US" dirty="0"/>
-              <a:t> holds a function</a:t>
-            </a:r>
-          </a:p>
-          <a:p>
-            <a:r>
-              <a:rPr lang="en-US" dirty="0"/>
-              <a:t>Executing a function is called </a:t>
-            </a:r>
-            <a:r>
-              <a:rPr lang="en-US" b="1" dirty="0"/>
-              <a:t>invoking</a:t>
-            </a:r>
-            <a:r>
-              <a:rPr lang="en-US" dirty="0"/>
-              <a:t>, </a:t>
-            </a:r>
-            <a:r>
-              <a:rPr lang="en-US" b="1" dirty="0"/>
-              <a:t>calling</a:t>
-            </a:r>
-            <a:r>
-              <a:rPr lang="en-US" dirty="0"/>
-              <a:t> or </a:t>
-            </a:r>
-            <a:r>
-              <a:rPr lang="en-US" b="1" dirty="0"/>
-              <a:t>applying</a:t>
-            </a:r>
-            <a:r>
-              <a:rPr lang="en-US" dirty="0"/>
-              <a:t> it</a:t>
-            </a:r>
-          </a:p>
-          <a:p>
-            <a:pPr marL="285750" indent="-285750">
-              <a:buFontTx/>
-              <a:buChar char="-"/>
-            </a:pPr>
-            <a:r>
-              <a:rPr lang="en-US" dirty="0"/>
-              <a:t>You call a function by putting parentheses after an expression that produces a function value</a:t>
-            </a:r>
-          </a:p>
-          <a:p>
-            <a:pPr marL="285750" indent="-285750">
-              <a:buFontTx/>
-              <a:buChar char="-"/>
-            </a:pPr>
-            <a:r>
-              <a:rPr lang="en-US" dirty="0"/>
-              <a:t>You usually directly use the name of the binding that holds the function</a:t>
-            </a:r>
-          </a:p>
-        </p:txBody>
-      </p:sp>
-      <p:sp>
-        <p:nvSpPr>
-          <p:cNvPr id="5" name="Slide Number Placeholder 4">
-            <a:extLst>
-              <a:ext uri="{FF2B5EF4-FFF2-40B4-BE49-F238E27FC236}">
-                <a16:creationId xmlns:a16="http://schemas.microsoft.com/office/drawing/2014/main" id="{84AE9B2C-864F-F9F2-7D9B-B40D00B07779}"/>
-              </a:ext>
-            </a:extLst>
-          </p:cNvPr>
-          <p:cNvSpPr>
-            <a:spLocks noGrp="1"/>
-          </p:cNvSpPr>
-          <p:nvPr>
-            <p:ph type="sldNum" sz="quarter" idx="12"/>
-          </p:nvPr>
-        </p:nvSpPr>
-        <p:spPr/>
-        <p:txBody>
-          <a:bodyPr/>
-          <a:lstStyle/>
-          <a:p>
-            <a:fld id="{FE024F78-56A6-7740-B68D-8D4D026EDF3F}" type="slidenum">
-              <a:rPr lang="en-US" smtClean="0"/>
-              <a:pPr/>
-              <a:t>7</a:t>
-            </a:fld>
-            <a:endParaRPr lang="en-US" dirty="0"/>
-          </a:p>
-        </p:txBody>
-      </p:sp>
-    </p:spTree>
-    <p:extLst>
-      <p:ext uri="{BB962C8B-B14F-4D97-AF65-F5344CB8AC3E}">
-        <p14:creationId xmlns:p14="http://schemas.microsoft.com/office/powerpoint/2010/main" val="255140355"/>
-      </p:ext>
-    </p:extLst>
-  </p:cSld>
-  <p:clrMapOvr>
-    <a:masterClrMapping/>
-  </p:clrMapOvr>
-</p:sld>
-</file>
-
-<file path=ppt/slides/slide8.xml><?xml version="1.0" encoding="utf-8"?>
 <p:sld xmlns:a="http://schemas.openxmlformats.org/drawingml/2006/main" xmlns:r="http://schemas.openxmlformats.org/officeDocument/2006/relationships" xmlns:p="http://schemas.openxmlformats.org/presentationml/2006/main">
   <p:cSld>
     <p:spTree>
@@ -16298,41 +16177,17 @@
           <a:bodyPr/>
           <a:lstStyle/>
           <a:p>
-            <a:pPr marL="285750" indent="-285750">
-              <a:buFontTx/>
-              <a:buChar char="-"/>
-            </a:pPr>
-            <a:r>
-              <a:rPr lang="en-US" dirty="0"/>
-              <a:t>The bindings contained in the parentheses of the function definition are called </a:t>
-            </a:r>
-            <a:r>
-              <a:rPr lang="en-US" b="1" dirty="0"/>
-              <a:t>parameters</a:t>
-            </a:r>
-          </a:p>
-          <a:p>
-            <a:pPr marL="285750" indent="-285750">
-              <a:buFontTx/>
-              <a:buChar char="-"/>
-            </a:pPr>
-            <a:r>
-              <a:rPr lang="en-US" dirty="0"/>
-              <a:t>When the function is invoked, the values placed in the parentheses are called </a:t>
-            </a:r>
-            <a:r>
-              <a:rPr lang="en-US" b="1" dirty="0"/>
-              <a:t>arguments</a:t>
-            </a:r>
-          </a:p>
-          <a:p>
             <a:pPr marL="569214" lvl="1">
               <a:buFontTx/>
               <a:buChar char="-"/>
             </a:pPr>
             <a:r>
               <a:rPr lang="en-US" dirty="0"/>
-              <a:t>The values between the parentheses when the function is invoked are given to the program inside the function</a:t>
+              <a:t>The bindings contained in the parentheses of the function definition are called </a:t>
+            </a:r>
+            <a:r>
+              <a:rPr lang="en-US" b="1" dirty="0"/>
+              <a:t>parameters</a:t>
             </a:r>
           </a:p>
           <a:p>
@@ -16342,7 +16197,11 @@
             </a:pPr>
             <a:r>
               <a:rPr lang="en-US" dirty="0"/>
-              <a:t>Different functions might need different numbers or different types of arguments</a:t>
+              <a:t>When the function is invoked, the values placed in the parentheses are called </a:t>
+            </a:r>
+            <a:r>
+              <a:rPr lang="en-US" b="1" dirty="0"/>
+              <a:t>arguments</a:t>
             </a:r>
           </a:p>
           <a:p>
@@ -16352,7 +16211,28 @@
             </a:pPr>
             <a:r>
               <a:rPr lang="en-US" dirty="0"/>
-              <a:t>The arguments in a function do not all need to be the same data type</a:t>
+              <a:t>Parameters:</a:t>
+            </a:r>
+            <a:br>
+              <a:rPr lang="en-US" dirty="0"/>
+            </a:br>
+            <a:r>
+              <a:rPr lang="en-US" dirty="0"/>
+              <a:t>	function addTwoNumbers(num1, num2) {</a:t>
+            </a:r>
+            <a:br>
+              <a:rPr lang="en-US" dirty="0"/>
+            </a:br>
+            <a:r>
+              <a:rPr lang="en-US" dirty="0"/>
+              <a:t>	    return num1 + num2;</a:t>
+            </a:r>
+            <a:br>
+              <a:rPr lang="en-US" dirty="0"/>
+            </a:br>
+            <a:r>
+              <a:rPr lang="en-US" dirty="0"/>
+              <a:t>	}</a:t>
             </a:r>
           </a:p>
           <a:p>
@@ -16362,25 +16242,15 @@
             </a:pPr>
             <a:r>
               <a:rPr lang="en-US" dirty="0"/>
-              <a:t>In JavaScript we do not need to state what are the data types of the arguments</a:t>
-            </a:r>
-          </a:p>
-          <a:p>
-            <a:pPr marL="852678" lvl="2">
-              <a:buFontTx/>
-              <a:buChar char="-"/>
-            </a:pPr>
-            <a:r>
+              <a:t>Arguments:</a:t>
+            </a:r>
+            <a:br>
               <a:rPr lang="en-US" dirty="0"/>
-              <a:t>Other languages such as Java do require this</a:t>
-            </a:r>
-          </a:p>
-          <a:p>
-            <a:pPr marL="285750" indent="-285750">
-              <a:buFontTx/>
-              <a:buChar char="-"/>
-            </a:pPr>
-            <a:endParaRPr lang="en-US" dirty="0"/>
+            </a:br>
+            <a:r>
+              <a:rPr lang="en-US" dirty="0"/>
+              <a:t>	addTwoNumbers(8, 16);       // returns 24</a:t>
+            </a:r>
           </a:p>
         </p:txBody>
       </p:sp>
@@ -16408,7 +16278,7 @@
             <a:fld id="{FE024F78-56A6-7740-B68D-8D4D026EDF3F}" type="slidenum">
               <a:rPr lang="en-US" smtClean="0"/>
               <a:pPr/>
-              <a:t>8</a:t>
+              <a:t>7</a:t>
             </a:fld>
             <a:endParaRPr lang="en-US" dirty="0"/>
           </a:p>
@@ -16418,6 +16288,184 @@
     <p:extLst>
       <p:ext uri="{BB962C8B-B14F-4D97-AF65-F5344CB8AC3E}">
         <p14:creationId xmlns:p14="http://schemas.microsoft.com/office/powerpoint/2010/main" val="1861158679"/>
+      </p:ext>
+    </p:extLst>
+  </p:cSld>
+  <p:clrMapOvr>
+    <a:masterClrMapping/>
+  </p:clrMapOvr>
+</p:sld>
+</file>
+
+<file path=ppt/slides/slide8.xml><?xml version="1.0" encoding="utf-8"?>
+<p:sld xmlns:a="http://schemas.openxmlformats.org/drawingml/2006/main" xmlns:r="http://schemas.openxmlformats.org/officeDocument/2006/relationships" xmlns:p="http://schemas.openxmlformats.org/presentationml/2006/main">
+  <p:cSld>
+    <p:spTree>
+      <p:nvGrpSpPr>
+        <p:cNvPr id="1" name="">
+          <a:extLst>
+            <a:ext uri="{FF2B5EF4-FFF2-40B4-BE49-F238E27FC236}">
+              <a16:creationId xmlns:a16="http://schemas.microsoft.com/office/drawing/2014/main" id="{7A03763F-B0E5-903C-3BE8-5D9E9A9991EC}"/>
+            </a:ext>
+          </a:extLst>
+        </p:cNvPr>
+        <p:cNvGrpSpPr/>
+        <p:nvPr/>
+      </p:nvGrpSpPr>
+      <p:grpSpPr>
+        <a:xfrm>
+          <a:off x="0" y="0"/>
+          <a:ext cx="0" cy="0"/>
+          <a:chOff x="0" y="0"/>
+          <a:chExt cx="0" cy="0"/>
+        </a:xfrm>
+      </p:grpSpPr>
+      <p:sp>
+        <p:nvSpPr>
+          <p:cNvPr id="2" name="Title 1">
+            <a:extLst>
+              <a:ext uri="{FF2B5EF4-FFF2-40B4-BE49-F238E27FC236}">
+                <a16:creationId xmlns:a16="http://schemas.microsoft.com/office/drawing/2014/main" id="{124DBE84-559F-B3EE-1A5F-5CA0AD03FDEE}"/>
+              </a:ext>
+            </a:extLst>
+          </p:cNvPr>
+          <p:cNvSpPr>
+            <a:spLocks noGrp="1"/>
+          </p:cNvSpPr>
+          <p:nvPr>
+            <p:ph type="title"/>
+          </p:nvPr>
+        </p:nvSpPr>
+        <p:spPr/>
+        <p:txBody>
+          <a:bodyPr/>
+          <a:lstStyle/>
+          <a:p>
+            <a:r>
+              <a:rPr lang="en-US" dirty="0"/>
+              <a:t>Function (cont’d)</a:t>
+            </a:r>
+          </a:p>
+        </p:txBody>
+      </p:sp>
+      <p:sp>
+        <p:nvSpPr>
+          <p:cNvPr id="4" name="Content Placeholder 3">
+            <a:extLst>
+              <a:ext uri="{FF2B5EF4-FFF2-40B4-BE49-F238E27FC236}">
+                <a16:creationId xmlns:a16="http://schemas.microsoft.com/office/drawing/2014/main" id="{37563D30-C13E-5DAA-45A5-87C907E3B157}"/>
+              </a:ext>
+            </a:extLst>
+          </p:cNvPr>
+          <p:cNvSpPr>
+            <a:spLocks noGrp="1"/>
+          </p:cNvSpPr>
+          <p:nvPr>
+            <p:ph sz="quarter" idx="36"/>
+          </p:nvPr>
+        </p:nvSpPr>
+        <p:spPr>
+          <a:xfrm>
+            <a:off x="741680" y="2465539"/>
+            <a:ext cx="10500989" cy="3723753"/>
+          </a:xfrm>
+        </p:spPr>
+        <p:txBody>
+          <a:bodyPr/>
+          <a:lstStyle/>
+          <a:p>
+            <a:pPr marL="569214" lvl="1">
+              <a:buFontTx/>
+              <a:buChar char="-"/>
+            </a:pPr>
+            <a:r>
+              <a:rPr lang="en-US" dirty="0"/>
+              <a:t>The values between the parentheses when the function is invoked are given to the program inside the function</a:t>
+            </a:r>
+          </a:p>
+          <a:p>
+            <a:pPr marL="569214" lvl="1">
+              <a:buFontTx/>
+              <a:buChar char="-"/>
+            </a:pPr>
+            <a:r>
+              <a:rPr lang="en-US" dirty="0"/>
+              <a:t>Different functions might need different numbers or different types of arguments</a:t>
+            </a:r>
+          </a:p>
+          <a:p>
+            <a:pPr marL="569214" lvl="1">
+              <a:buFontTx/>
+              <a:buChar char="-"/>
+            </a:pPr>
+            <a:r>
+              <a:rPr lang="en-US" dirty="0"/>
+              <a:t>The arguments in a function do not all need to be the same data type</a:t>
+            </a:r>
+          </a:p>
+          <a:p>
+            <a:pPr marL="569214" lvl="1">
+              <a:buFontTx/>
+              <a:buChar char="-"/>
+            </a:pPr>
+            <a:r>
+              <a:rPr lang="en-US" dirty="0"/>
+              <a:t>In JavaScript we do not need to state what are the data types of the arguments</a:t>
+            </a:r>
+          </a:p>
+          <a:p>
+            <a:pPr marL="852678" lvl="2">
+              <a:buFontTx/>
+              <a:buChar char="-"/>
+            </a:pPr>
+            <a:r>
+              <a:rPr lang="en-US" dirty="0"/>
+              <a:t>Other languages such as Java do require this</a:t>
+            </a:r>
+          </a:p>
+          <a:p>
+            <a:pPr marL="285750" indent="-285750">
+              <a:buFontTx/>
+              <a:buChar char="-"/>
+            </a:pPr>
+            <a:endParaRPr lang="en-US" dirty="0"/>
+          </a:p>
+        </p:txBody>
+      </p:sp>
+      <p:sp>
+        <p:nvSpPr>
+          <p:cNvPr id="5" name="Slide Number Placeholder 4">
+            <a:extLst>
+              <a:ext uri="{FF2B5EF4-FFF2-40B4-BE49-F238E27FC236}">
+                <a16:creationId xmlns:a16="http://schemas.microsoft.com/office/drawing/2014/main" id="{5DA67875-1F1B-A305-4C5F-25D3C78A4DE6}"/>
+              </a:ext>
+            </a:extLst>
+          </p:cNvPr>
+          <p:cNvSpPr>
+            <a:spLocks noGrp="1"/>
+          </p:cNvSpPr>
+          <p:nvPr>
+            <p:ph type="sldNum" sz="quarter" idx="12"/>
+          </p:nvPr>
+        </p:nvSpPr>
+        <p:spPr/>
+        <p:txBody>
+          <a:bodyPr/>
+          <a:lstStyle/>
+          <a:p>
+            <a:fld id="{FE024F78-56A6-7740-B68D-8D4D026EDF3F}" type="slidenum">
+              <a:rPr lang="en-US" smtClean="0"/>
+              <a:pPr/>
+              <a:t>8</a:t>
+            </a:fld>
+            <a:endParaRPr lang="en-US" dirty="0"/>
+          </a:p>
+        </p:txBody>
+      </p:sp>
+    </p:spTree>
+    <p:extLst>
+      <p:ext uri="{BB962C8B-B14F-4D97-AF65-F5344CB8AC3E}">
+        <p14:creationId xmlns:p14="http://schemas.microsoft.com/office/powerpoint/2010/main" val="4155928048"/>
       </p:ext>
     </p:extLst>
   </p:cSld>
@@ -17679,6 +17727,15 @@
 </file>
 
 <file path=customXml/item2.xml><?xml version="1.0" encoding="utf-8"?>
+<?mso-contentType ?>
+<FormTemplates xmlns="http://schemas.microsoft.com/sharepoint/v3/contenttype/forms">
+  <Display>DocumentLibraryForm</Display>
+  <Edit>DocumentLibraryForm</Edit>
+  <New>DocumentLibraryForm</New>
+</FormTemplates>
+</file>
+
+<file path=customXml/item3.xml><?xml version="1.0" encoding="utf-8"?>
 <p:properties xmlns:p="http://schemas.microsoft.com/office/2006/metadata/properties" xmlns:xsi="http://www.w3.org/2001/XMLSchema-instance" xmlns:pc="http://schemas.microsoft.com/office/infopath/2007/PartnerControls">
   <documentManagement>
     <_ip_UnifiedCompliancePolicyUIAction xmlns="http://schemas.microsoft.com/sharepoint/v3" xsi:nil="true"/>
@@ -17696,15 +17753,6 @@
     <MediaServiceKeyPoints xmlns="71af3243-3dd4-4a8d-8c0d-dd76da1f02a5" xsi:nil="true"/>
   </documentManagement>
 </p:properties>
-</file>
-
-<file path=customXml/item3.xml><?xml version="1.0" encoding="utf-8"?>
-<?mso-contentType ?>
-<FormTemplates xmlns="http://schemas.microsoft.com/sharepoint/v3/contenttype/forms">
-  <Display>DocumentLibraryForm</Display>
-  <Edit>DocumentLibraryForm</Edit>
-  <New>DocumentLibraryForm</New>
-</FormTemplates>
 </file>
 
 <file path=customXml/itemProps1.xml><?xml version="1.0" encoding="utf-8"?>
@@ -17729,6 +17777,14 @@
 </file>
 
 <file path=customXml/itemProps2.xml><?xml version="1.0" encoding="utf-8"?>
+<ds:datastoreItem xmlns:ds="http://schemas.openxmlformats.org/officeDocument/2006/customXml" ds:itemID="{A78D9019-7CE1-4B77-8F5D-67F6576598CB}">
+  <ds:schemaRefs>
+    <ds:schemaRef ds:uri="http://schemas.microsoft.com/sharepoint/v3/contenttype/forms"/>
+  </ds:schemaRefs>
+</ds:datastoreItem>
+</file>
+
+<file path=customXml/itemProps3.xml><?xml version="1.0" encoding="utf-8"?>
 <ds:datastoreItem xmlns:ds="http://schemas.openxmlformats.org/officeDocument/2006/customXml" ds:itemID="{E42E6C21-1752-4E06-9FE3-208D45ADB668}">
   <ds:schemaRefs>
     <ds:schemaRef ds:uri="http://schemas.microsoft.com/office/2006/metadata/properties"/>
@@ -17738,16 +17794,4 @@
     <ds:schemaRef ds:uri="230e9df3-be65-4c73-a93b-d1236ebd677e"/>
   </ds:schemaRefs>
 </ds:datastoreItem>
-</file>
-
-<file path=customXml/itemProps3.xml><?xml version="1.0" encoding="utf-8"?>
-<ds:datastoreItem xmlns:ds="http://schemas.openxmlformats.org/officeDocument/2006/customXml" ds:itemID="{A78D9019-7CE1-4B77-8F5D-67F6576598CB}">
-  <ds:schemaRefs>
-    <ds:schemaRef ds:uri="http://schemas.microsoft.com/sharepoint/v3/contenttype/forms"/>
-  </ds:schemaRefs>
-</ds:datastoreItem>
-</file>
-
-<file path=docMetadata/LabelInfo.xml><?xml version="1.0" encoding="utf-8"?>
-<clbl:labelList xmlns:clbl="http://schemas.microsoft.com/office/2020/mipLabelMetadata"/>
 </file>